--- a/Modern-Physics/lecture/03_Wave_Properties_of_Particles/l2.pptx
+++ b/Modern-Physics/lecture/03_Wave_Properties_of_Particles/l2.pptx
@@ -6,9 +6,7 @@
   </p:sldMasterIdLst>
   <p:sldIdLst>
     <p:sldId id="256" r:id="rId2"/>
-    <p:sldId id="257" r:id="rId3"/>
-    <p:sldId id="258" r:id="rId4"/>
-    <p:sldId id="259" r:id="rId5"/>
+    <p:sldId id="259" r:id="rId3"/>
   </p:sldIdLst>
   <p:sldSz cx="12192000" cy="6858000"/>
   <p:notesSz cx="6858000" cy="9144000"/>
@@ -107,6 +105,11 @@
       </a:defRPr>
     </a:lvl9pPr>
   </p:defaultTextStyle>
+  <p:extLst>
+    <p:ext uri="{EFAFB233-063F-42B5-8137-9DF3F51BA10A}">
+      <p15:sldGuideLst xmlns:p15="http://schemas.microsoft.com/office/powerpoint/2012/main"/>
+    </p:ext>
+  </p:extLst>
 </p:presentation>
 </file>
 
@@ -257,7 +260,7 @@
           <a:p>
             <a:fld id="{95AEDF69-78C5-4321-AD9F-E50A3E378F73}" type="datetimeFigureOut">
               <a:rPr lang="zh-TW" altLang="en-US" smtClean="0"/>
-              <a:t>2026/3/30</a:t>
+              <a:t>2026/4/9</a:t>
             </a:fld>
             <a:endParaRPr lang="zh-TW" altLang="en-US"/>
           </a:p>
@@ -455,7 +458,7 @@
           <a:p>
             <a:fld id="{95AEDF69-78C5-4321-AD9F-E50A3E378F73}" type="datetimeFigureOut">
               <a:rPr lang="zh-TW" altLang="en-US" smtClean="0"/>
-              <a:t>2026/3/30</a:t>
+              <a:t>2026/4/9</a:t>
             </a:fld>
             <a:endParaRPr lang="zh-TW" altLang="en-US"/>
           </a:p>
@@ -663,7 +666,7 @@
           <a:p>
             <a:fld id="{95AEDF69-78C5-4321-AD9F-E50A3E378F73}" type="datetimeFigureOut">
               <a:rPr lang="zh-TW" altLang="en-US" smtClean="0"/>
-              <a:t>2026/3/30</a:t>
+              <a:t>2026/4/9</a:t>
             </a:fld>
             <a:endParaRPr lang="zh-TW" altLang="en-US"/>
           </a:p>
@@ -861,7 +864,7 @@
           <a:p>
             <a:fld id="{95AEDF69-78C5-4321-AD9F-E50A3E378F73}" type="datetimeFigureOut">
               <a:rPr lang="zh-TW" altLang="en-US" smtClean="0"/>
-              <a:t>2026/3/30</a:t>
+              <a:t>2026/4/9</a:t>
             </a:fld>
             <a:endParaRPr lang="zh-TW" altLang="en-US"/>
           </a:p>
@@ -1136,7 +1139,7 @@
           <a:p>
             <a:fld id="{95AEDF69-78C5-4321-AD9F-E50A3E378F73}" type="datetimeFigureOut">
               <a:rPr lang="zh-TW" altLang="en-US" smtClean="0"/>
-              <a:t>2026/3/30</a:t>
+              <a:t>2026/4/9</a:t>
             </a:fld>
             <a:endParaRPr lang="zh-TW" altLang="en-US"/>
           </a:p>
@@ -1401,7 +1404,7 @@
           <a:p>
             <a:fld id="{95AEDF69-78C5-4321-AD9F-E50A3E378F73}" type="datetimeFigureOut">
               <a:rPr lang="zh-TW" altLang="en-US" smtClean="0"/>
-              <a:t>2026/3/30</a:t>
+              <a:t>2026/4/9</a:t>
             </a:fld>
             <a:endParaRPr lang="zh-TW" altLang="en-US"/>
           </a:p>
@@ -1813,7 +1816,7 @@
           <a:p>
             <a:fld id="{95AEDF69-78C5-4321-AD9F-E50A3E378F73}" type="datetimeFigureOut">
               <a:rPr lang="zh-TW" altLang="en-US" smtClean="0"/>
-              <a:t>2026/3/30</a:t>
+              <a:t>2026/4/9</a:t>
             </a:fld>
             <a:endParaRPr lang="zh-TW" altLang="en-US"/>
           </a:p>
@@ -1954,7 +1957,7 @@
           <a:p>
             <a:fld id="{95AEDF69-78C5-4321-AD9F-E50A3E378F73}" type="datetimeFigureOut">
               <a:rPr lang="zh-TW" altLang="en-US" smtClean="0"/>
-              <a:t>2026/3/30</a:t>
+              <a:t>2026/4/9</a:t>
             </a:fld>
             <a:endParaRPr lang="zh-TW" altLang="en-US"/>
           </a:p>
@@ -2067,7 +2070,7 @@
           <a:p>
             <a:fld id="{95AEDF69-78C5-4321-AD9F-E50A3E378F73}" type="datetimeFigureOut">
               <a:rPr lang="zh-TW" altLang="en-US" smtClean="0"/>
-              <a:t>2026/3/30</a:t>
+              <a:t>2026/4/9</a:t>
             </a:fld>
             <a:endParaRPr lang="zh-TW" altLang="en-US"/>
           </a:p>
@@ -2378,7 +2381,7 @@
           <a:p>
             <a:fld id="{95AEDF69-78C5-4321-AD9F-E50A3E378F73}" type="datetimeFigureOut">
               <a:rPr lang="zh-TW" altLang="en-US" smtClean="0"/>
-              <a:t>2026/3/30</a:t>
+              <a:t>2026/4/9</a:t>
             </a:fld>
             <a:endParaRPr lang="zh-TW" altLang="en-US"/>
           </a:p>
@@ -2666,7 +2669,7 @@
           <a:p>
             <a:fld id="{95AEDF69-78C5-4321-AD9F-E50A3E378F73}" type="datetimeFigureOut">
               <a:rPr lang="zh-TW" altLang="en-US" smtClean="0"/>
-              <a:t>2026/3/30</a:t>
+              <a:t>2026/4/9</a:t>
             </a:fld>
             <a:endParaRPr lang="zh-TW" altLang="en-US"/>
           </a:p>
@@ -2907,7 +2910,7 @@
           <a:p>
             <a:fld id="{95AEDF69-78C5-4321-AD9F-E50A3E378F73}" type="datetimeFigureOut">
               <a:rPr lang="zh-TW" altLang="en-US" smtClean="0"/>
-              <a:t>2026/3/30</a:t>
+              <a:t>2026/4/9</a:t>
             </a:fld>
             <a:endParaRPr lang="zh-TW" altLang="en-US"/>
           </a:p>
@@ -3384,13 +3387,13 @@
   <p:clrMapOvr>
     <a:masterClrMapping/>
   </p:clrMapOvr>
-  <mc:AlternateContent xmlns:mc="http://schemas.openxmlformats.org/markup-compatibility/2006">
-    <mc:Choice xmlns:p14="http://schemas.microsoft.com/office/powerpoint/2010/main" Requires="p14">
+  <mc:AlternateContent xmlns:mc="http://schemas.openxmlformats.org/markup-compatibility/2006" xmlns:p14="http://schemas.microsoft.com/office/powerpoint/2010/main">
+    <mc:Choice Requires="p14">
       <p:transition spd="slow" p14:dur="2000">
         <p:cut/>
       </p:transition>
     </mc:Choice>
-    <mc:Fallback>
+    <mc:Fallback xmlns="">
       <p:transition spd="slow">
         <p:cut/>
       </p:transition>
@@ -3421,7 +3424,7 @@
           <p:cNvPr id="2" name="標題 1">
             <a:extLst>
               <a:ext uri="{FF2B5EF4-FFF2-40B4-BE49-F238E27FC236}">
-                <a16:creationId xmlns:a16="http://schemas.microsoft.com/office/drawing/2014/main" id="{F11CADA5-E220-1D0A-395E-A31FACC075E9}"/>
+                <a16:creationId xmlns:a16="http://schemas.microsoft.com/office/drawing/2014/main" id="{77E84745-6E50-E7CD-18AC-BA9ACE278B87}"/>
               </a:ext>
             </a:extLst>
           </p:cNvPr>
@@ -3434,8 +3437,8 @@
         </p:nvSpPr>
         <p:spPr>
           <a:xfrm>
-            <a:off x="3556000" y="5660649"/>
-            <a:ext cx="7797799" cy="1325563"/>
+            <a:off x="10741" y="-97454"/>
+            <a:ext cx="12301332" cy="1325563"/>
           </a:xfrm>
         </p:spPr>
         <p:txBody>
@@ -3444,21 +3447,18 @@
           <a:p>
             <a:r>
               <a:rPr lang="en-US" altLang="zh-TW" b="1"/>
-              <a:t>NaCl</a:t>
-            </a:r>
-            <a:r>
-              <a:rPr lang="zh-TW" altLang="en-US" b="1"/>
-              <a:t>的布拉格平面</a:t>
-            </a:r>
+              <a:t>Davisson-Germer Experiment Schematic &amp; Data Plots</a:t>
+            </a:r>
+            <a:endParaRPr lang="zh-TW" altLang="en-US" b="1"/>
           </a:p>
         </p:txBody>
       </p:sp>
       <p:pic>
         <p:nvPicPr>
-          <p:cNvPr id="5" name="圖片 4">
-            <a:extLst>
-              <a:ext uri="{FF2B5EF4-FFF2-40B4-BE49-F238E27FC236}">
-                <a16:creationId xmlns:a16="http://schemas.microsoft.com/office/drawing/2014/main" id="{DB917F12-F48C-F442-4C5B-6549134EEFC8}"/>
+          <p:cNvPr id="7" name="圖片 6">
+            <a:extLst>
+              <a:ext uri="{FF2B5EF4-FFF2-40B4-BE49-F238E27FC236}">
+                <a16:creationId xmlns:a16="http://schemas.microsoft.com/office/drawing/2014/main" id="{3DD9F199-E7B3-8996-F338-C3E67E4798C8}"/>
               </a:ext>
             </a:extLst>
           </p:cNvPr>
@@ -3475,479 +3475,8 @@
         </p:blipFill>
         <p:spPr>
           <a:xfrm>
-            <a:off x="1000125" y="365125"/>
-            <a:ext cx="10191750" cy="5381625"/>
-          </a:xfrm>
-          <a:prstGeom prst="rect">
-            <a:avLst/>
-          </a:prstGeom>
-        </p:spPr>
-      </p:pic>
-      <p:sp>
-        <p:nvSpPr>
-          <p:cNvPr id="6" name="矩形 5">
-            <a:extLst>
-              <a:ext uri="{FF2B5EF4-FFF2-40B4-BE49-F238E27FC236}">
-                <a16:creationId xmlns:a16="http://schemas.microsoft.com/office/drawing/2014/main" id="{EAE56683-2991-8CCF-8848-BDAA10B85AD5}"/>
-              </a:ext>
-            </a:extLst>
-          </p:cNvPr>
-          <p:cNvSpPr/>
-          <p:nvPr/>
-        </p:nvSpPr>
-        <p:spPr>
-          <a:xfrm>
-            <a:off x="7435273" y="1524000"/>
-            <a:ext cx="295563" cy="3371273"/>
-          </a:xfrm>
-          <a:prstGeom prst="rect">
-            <a:avLst/>
-          </a:prstGeom>
-          <a:solidFill>
-            <a:srgbClr val="FF0000">
-              <a:alpha val="45000"/>
-            </a:srgbClr>
-          </a:solidFill>
-        </p:spPr>
-        <p:style>
-          <a:lnRef idx="2">
-            <a:schemeClr val="accent1">
-              <a:shade val="15000"/>
-            </a:schemeClr>
-          </a:lnRef>
-          <a:fillRef idx="1">
-            <a:schemeClr val="accent1"/>
-          </a:fillRef>
-          <a:effectRef idx="0">
-            <a:schemeClr val="accent1"/>
-          </a:effectRef>
-          <a:fontRef idx="minor">
-            <a:schemeClr val="lt1"/>
-          </a:fontRef>
-        </p:style>
-        <p:txBody>
-          <a:bodyPr rtlCol="0" anchor="ctr"/>
-          <a:lstStyle/>
-          <a:p>
-            <a:pPr algn="ctr"/>
-            <a:endParaRPr lang="zh-TW" altLang="en-US"/>
-          </a:p>
-        </p:txBody>
-      </p:sp>
-      <p:sp>
-        <p:nvSpPr>
-          <p:cNvPr id="9" name="矩形 8">
-            <a:extLst>
-              <a:ext uri="{FF2B5EF4-FFF2-40B4-BE49-F238E27FC236}">
-                <a16:creationId xmlns:a16="http://schemas.microsoft.com/office/drawing/2014/main" id="{1DCEA79D-5059-2BF1-E3A7-6AF3FC06B9A7}"/>
-              </a:ext>
-            </a:extLst>
-          </p:cNvPr>
-          <p:cNvSpPr/>
-          <p:nvPr/>
-        </p:nvSpPr>
-        <p:spPr>
-          <a:xfrm>
-            <a:off x="8926945" y="1523999"/>
-            <a:ext cx="295563" cy="3371273"/>
-          </a:xfrm>
-          <a:prstGeom prst="rect">
-            <a:avLst/>
-          </a:prstGeom>
-          <a:solidFill>
-            <a:srgbClr val="FF0000">
-              <a:alpha val="45000"/>
-            </a:srgbClr>
-          </a:solidFill>
-        </p:spPr>
-        <p:style>
-          <a:lnRef idx="2">
-            <a:schemeClr val="accent1">
-              <a:shade val="15000"/>
-            </a:schemeClr>
-          </a:lnRef>
-          <a:fillRef idx="1">
-            <a:schemeClr val="accent1"/>
-          </a:fillRef>
-          <a:effectRef idx="0">
-            <a:schemeClr val="accent1"/>
-          </a:effectRef>
-          <a:fontRef idx="minor">
-            <a:schemeClr val="lt1"/>
-          </a:fontRef>
-        </p:style>
-        <p:txBody>
-          <a:bodyPr rtlCol="0" anchor="ctr"/>
-          <a:lstStyle/>
-          <a:p>
-            <a:pPr algn="ctr"/>
-            <a:endParaRPr lang="zh-TW" altLang="en-US"/>
-          </a:p>
-        </p:txBody>
-      </p:sp>
-      <p:sp>
-        <p:nvSpPr>
-          <p:cNvPr id="10" name="矩形 9">
-            <a:extLst>
-              <a:ext uri="{FF2B5EF4-FFF2-40B4-BE49-F238E27FC236}">
-                <a16:creationId xmlns:a16="http://schemas.microsoft.com/office/drawing/2014/main" id="{7E4AA081-1FC7-B8D7-58D3-12F95F22DC83}"/>
-              </a:ext>
-            </a:extLst>
-          </p:cNvPr>
-          <p:cNvSpPr/>
-          <p:nvPr/>
-        </p:nvSpPr>
-        <p:spPr>
-          <a:xfrm>
-            <a:off x="10427853" y="1523999"/>
-            <a:ext cx="295563" cy="3371273"/>
-          </a:xfrm>
-          <a:prstGeom prst="rect">
-            <a:avLst/>
-          </a:prstGeom>
-          <a:solidFill>
-            <a:srgbClr val="FF0000">
-              <a:alpha val="45000"/>
-            </a:srgbClr>
-          </a:solidFill>
-        </p:spPr>
-        <p:style>
-          <a:lnRef idx="2">
-            <a:schemeClr val="accent1">
-              <a:shade val="15000"/>
-            </a:schemeClr>
-          </a:lnRef>
-          <a:fillRef idx="1">
-            <a:schemeClr val="accent1"/>
-          </a:fillRef>
-          <a:effectRef idx="0">
-            <a:schemeClr val="accent1"/>
-          </a:effectRef>
-          <a:fontRef idx="minor">
-            <a:schemeClr val="lt1"/>
-          </a:fontRef>
-        </p:style>
-        <p:txBody>
-          <a:bodyPr rtlCol="0" anchor="ctr"/>
-          <a:lstStyle/>
-          <a:p>
-            <a:pPr algn="ctr"/>
-            <a:endParaRPr lang="zh-TW" altLang="en-US"/>
-          </a:p>
-        </p:txBody>
-      </p:sp>
-      <p:sp>
-        <p:nvSpPr>
-          <p:cNvPr id="11" name="矩形 10">
-            <a:extLst>
-              <a:ext uri="{FF2B5EF4-FFF2-40B4-BE49-F238E27FC236}">
-                <a16:creationId xmlns:a16="http://schemas.microsoft.com/office/drawing/2014/main" id="{9DA1C2F5-5D16-45FE-6A86-C0B1323E830D}"/>
-              </a:ext>
-            </a:extLst>
-          </p:cNvPr>
-          <p:cNvSpPr/>
-          <p:nvPr/>
-        </p:nvSpPr>
-        <p:spPr>
-          <a:xfrm rot="18774400">
-            <a:off x="8988547" y="698295"/>
-            <a:ext cx="295563" cy="5189369"/>
-          </a:xfrm>
-          <a:prstGeom prst="rect">
-            <a:avLst/>
-          </a:prstGeom>
-          <a:solidFill>
-            <a:schemeClr val="accent5">
-              <a:lumMod val="50000"/>
-              <a:alpha val="45000"/>
-            </a:schemeClr>
-          </a:solidFill>
-        </p:spPr>
-        <p:style>
-          <a:lnRef idx="2">
-            <a:schemeClr val="accent1">
-              <a:shade val="15000"/>
-            </a:schemeClr>
-          </a:lnRef>
-          <a:fillRef idx="1">
-            <a:schemeClr val="accent1"/>
-          </a:fillRef>
-          <a:effectRef idx="0">
-            <a:schemeClr val="accent1"/>
-          </a:effectRef>
-          <a:fontRef idx="minor">
-            <a:schemeClr val="lt1"/>
-          </a:fontRef>
-        </p:style>
-        <p:txBody>
-          <a:bodyPr rtlCol="0" anchor="ctr"/>
-          <a:lstStyle/>
-          <a:p>
-            <a:pPr algn="ctr"/>
-            <a:endParaRPr lang="zh-TW" altLang="en-US"/>
-          </a:p>
-        </p:txBody>
-      </p:sp>
-      <p:sp>
-        <p:nvSpPr>
-          <p:cNvPr id="12" name="矩形 11">
-            <a:extLst>
-              <a:ext uri="{FF2B5EF4-FFF2-40B4-BE49-F238E27FC236}">
-                <a16:creationId xmlns:a16="http://schemas.microsoft.com/office/drawing/2014/main" id="{2B22A0CF-BA63-81C5-758E-934707366396}"/>
-              </a:ext>
-            </a:extLst>
-          </p:cNvPr>
-          <p:cNvSpPr/>
-          <p:nvPr/>
-        </p:nvSpPr>
-        <p:spPr>
-          <a:xfrm rot="18774400">
-            <a:off x="8278948" y="1413558"/>
-            <a:ext cx="295563" cy="5189369"/>
-          </a:xfrm>
-          <a:prstGeom prst="rect">
-            <a:avLst/>
-          </a:prstGeom>
-          <a:solidFill>
-            <a:schemeClr val="accent5">
-              <a:lumMod val="50000"/>
-              <a:alpha val="45000"/>
-            </a:schemeClr>
-          </a:solidFill>
-        </p:spPr>
-        <p:style>
-          <a:lnRef idx="2">
-            <a:schemeClr val="accent1">
-              <a:shade val="15000"/>
-            </a:schemeClr>
-          </a:lnRef>
-          <a:fillRef idx="1">
-            <a:schemeClr val="accent1"/>
-          </a:fillRef>
-          <a:effectRef idx="0">
-            <a:schemeClr val="accent1"/>
-          </a:effectRef>
-          <a:fontRef idx="minor">
-            <a:schemeClr val="lt1"/>
-          </a:fontRef>
-        </p:style>
-        <p:txBody>
-          <a:bodyPr rtlCol="0" anchor="ctr"/>
-          <a:lstStyle/>
-          <a:p>
-            <a:pPr algn="ctr"/>
-            <a:endParaRPr lang="zh-TW" altLang="en-US"/>
-          </a:p>
-        </p:txBody>
-      </p:sp>
-      <p:sp>
-        <p:nvSpPr>
-          <p:cNvPr id="15" name="矩形 14">
-            <a:extLst>
-              <a:ext uri="{FF2B5EF4-FFF2-40B4-BE49-F238E27FC236}">
-                <a16:creationId xmlns:a16="http://schemas.microsoft.com/office/drawing/2014/main" id="{F40EDD75-37C9-02BF-D157-0FCB71B3A68B}"/>
-              </a:ext>
-            </a:extLst>
-          </p:cNvPr>
-          <p:cNvSpPr/>
-          <p:nvPr/>
-        </p:nvSpPr>
-        <p:spPr>
-          <a:xfrm>
-            <a:off x="4265600" y="886691"/>
-            <a:ext cx="1964328" cy="4391064"/>
-          </a:xfrm>
-          <a:prstGeom prst="rect">
-            <a:avLst/>
-          </a:prstGeom>
-          <a:solidFill>
-            <a:srgbClr val="FF0000">
-              <a:alpha val="47000"/>
-            </a:srgbClr>
-          </a:solidFill>
-          <a:scene3d>
-            <a:camera prst="isometricRightUp"/>
-            <a:lightRig rig="threePt" dir="t"/>
-          </a:scene3d>
-        </p:spPr>
-        <p:style>
-          <a:lnRef idx="2">
-            <a:schemeClr val="accent1">
-              <a:shade val="15000"/>
-            </a:schemeClr>
-          </a:lnRef>
-          <a:fillRef idx="1">
-            <a:schemeClr val="accent1"/>
-          </a:fillRef>
-          <a:effectRef idx="0">
-            <a:schemeClr val="accent1"/>
-          </a:effectRef>
-          <a:fontRef idx="minor">
-            <a:schemeClr val="lt1"/>
-          </a:fontRef>
-        </p:style>
-        <p:txBody>
-          <a:bodyPr rtlCol="0" anchor="ctr"/>
-          <a:lstStyle/>
-          <a:p>
-            <a:pPr algn="ctr"/>
-            <a:endParaRPr lang="zh-TW" altLang="en-US"/>
-          </a:p>
-        </p:txBody>
-      </p:sp>
-      <p:sp>
-        <p:nvSpPr>
-          <p:cNvPr id="13" name="矩形 12">
-            <a:extLst>
-              <a:ext uri="{FF2B5EF4-FFF2-40B4-BE49-F238E27FC236}">
-                <a16:creationId xmlns:a16="http://schemas.microsoft.com/office/drawing/2014/main" id="{5520A3BD-CE76-E28E-ADF0-5BE69F65BB69}"/>
-              </a:ext>
-            </a:extLst>
-          </p:cNvPr>
-          <p:cNvSpPr/>
-          <p:nvPr/>
-        </p:nvSpPr>
-        <p:spPr>
-          <a:xfrm>
-            <a:off x="2121322" y="494429"/>
-            <a:ext cx="3183088" cy="4912630"/>
-          </a:xfrm>
-          <a:prstGeom prst="rect">
-            <a:avLst/>
-          </a:prstGeom>
-          <a:solidFill>
-            <a:schemeClr val="accent5">
-              <a:lumMod val="50000"/>
-              <a:alpha val="45000"/>
-            </a:schemeClr>
-          </a:solidFill>
-          <a:ln>
-            <a:noFill/>
-            <a:round/>
-          </a:ln>
-          <a:scene3d>
-            <a:camera prst="isometricLeftDown">
-              <a:rot lat="2340000" lon="2100000" rev="60000"/>
-            </a:camera>
-            <a:lightRig rig="threePt" dir="t"/>
-          </a:scene3d>
-        </p:spPr>
-        <p:style>
-          <a:lnRef idx="2">
-            <a:schemeClr val="accent1">
-              <a:shade val="15000"/>
-            </a:schemeClr>
-          </a:lnRef>
-          <a:fillRef idx="1">
-            <a:schemeClr val="accent1"/>
-          </a:fillRef>
-          <a:effectRef idx="0">
-            <a:schemeClr val="accent1"/>
-          </a:effectRef>
-          <a:fontRef idx="minor">
-            <a:schemeClr val="lt1"/>
-          </a:fontRef>
-        </p:style>
-        <p:txBody>
-          <a:bodyPr rtlCol="0" anchor="ctr"/>
-          <a:lstStyle/>
-          <a:p>
-            <a:pPr algn="ctr"/>
-            <a:endParaRPr lang="zh-TW" altLang="en-US"/>
-          </a:p>
-        </p:txBody>
-      </p:sp>
-      <p:pic>
-        <p:nvPicPr>
-          <p:cNvPr id="14" name="圖片 13">
-            <a:extLst>
-              <a:ext uri="{FF2B5EF4-FFF2-40B4-BE49-F238E27FC236}">
-                <a16:creationId xmlns:a16="http://schemas.microsoft.com/office/drawing/2014/main" id="{14C07C72-BEFB-F90E-11F6-7218C5E9C53C}"/>
-              </a:ext>
-            </a:extLst>
-          </p:cNvPr>
-          <p:cNvPicPr>
-            <a:picLocks noChangeAspect="1"/>
-          </p:cNvPicPr>
-          <p:nvPr/>
-        </p:nvPicPr>
-        <p:blipFill>
-          <a:blip r:embed="rId3">
-            <a:extLst>
-              <a:ext uri="{BEBA8EAE-BF5A-486C-A8C5-ECC9F3942E4B}">
-                <a14:imgProps xmlns:a14="http://schemas.microsoft.com/office/drawing/2010/main">
-                  <a14:imgLayer r:embed="rId4">
-                    <a14:imgEffect>
-                      <a14:backgroundRemoval t="5310" b="90265" l="2617" r="24673">
-                        <a14:foregroundMark x1="18318" y1="54867" x2="18972" y2="54867"/>
-                        <a14:foregroundMark x1="19439" y1="56460" x2="18505" y2="52035"/>
-                        <a14:foregroundMark x1="15888" y1="54867" x2="16822" y2="54867"/>
-                        <a14:foregroundMark x1="18411" y1="81770" x2="18972" y2="81770"/>
-                        <a14:foregroundMark x1="18131" y1="84602" x2="17477" y2="84602"/>
-                        <a14:foregroundMark x1="18131" y1="82655" x2="19439" y2="82832"/>
-                        <a14:foregroundMark x1="20467" y1="83186" x2="19533" y2="83186"/>
-                        <a14:foregroundMark x1="16075" y1="80177" x2="16822" y2="80354"/>
-                        <a14:foregroundMark x1="11776" y1="79646" x2="12804" y2="79646"/>
-                        <a14:foregroundMark x1="15327" y1="80531" x2="13458" y2="80354"/>
-                        <a14:foregroundMark x1="14673" y1="79646" x2="17757" y2="81062"/>
-                        <a14:foregroundMark x1="17944" y1="80531" x2="16075" y2="80354"/>
-                        <a14:foregroundMark x1="17664" y1="80354" x2="19439" y2="80531"/>
-                        <a14:foregroundMark x1="18692" y1="80531" x2="18879" y2="61416"/>
-                        <a14:foregroundMark x1="18972" y1="59823" x2="19533" y2="64956"/>
-                        <a14:foregroundMark x1="19159" y1="66726" x2="18879" y2="75221"/>
-                        <a14:foregroundMark x1="20561" y1="83363" x2="17290" y2="83894"/>
-                        <a14:foregroundMark x1="16916" y1="83717" x2="16542" y2="87080"/>
-                        <a14:foregroundMark x1="16542" y1="87080" x2="16542" y2="87080"/>
-                        <a14:foregroundMark x1="20093" y1="86018" x2="21215" y2="86549"/>
-                        <a14:foregroundMark x1="18505" y1="86195" x2="19626" y2="86195"/>
-                        <a14:foregroundMark x1="18785" y1="27965" x2="19159" y2="52743"/>
-                        <a14:foregroundMark x1="18318" y1="20000" x2="19907" y2="24602"/>
-                        <a14:foregroundMark x1="18131" y1="17699" x2="18972" y2="17699"/>
-                        <a14:foregroundMark x1="18224" y1="17699" x2="18972" y2="17699"/>
-                        <a14:foregroundMark x1="2991" y1="53628" x2="18785" y2="54336"/>
-                        <a14:foregroundMark x1="8692" y1="46018" x2="4206" y2="52389"/>
-                        <a14:foregroundMark x1="10280" y1="47257" x2="21682" y2="47965"/>
-                        <a14:foregroundMark x1="8224" y1="12389" x2="9252" y2="19823"/>
-                        <a14:foregroundMark x1="12897" y1="75752" x2="9346" y2="78584"/>
-                        <a14:foregroundMark x1="8318" y1="80177" x2="2336" y2="84071"/>
-                        <a14:foregroundMark x1="23551" y1="80177" x2="23925" y2="84956"/>
-                        <a14:foregroundMark x1="13832" y1="36283" x2="13458" y2="44602"/>
-                        <a14:foregroundMark x1="13178" y1="42301" x2="14299" y2="42832"/>
-                        <a14:foregroundMark x1="13084" y1="7080" x2="14393" y2="12035"/>
-                        <a14:foregroundMark x1="14019" y1="5310" x2="13925" y2="12035"/>
-                        <a14:foregroundMark x1="24206" y1="14513" x2="24206" y2="19292"/>
-                        <a14:foregroundMark x1="23178" y1="17876" x2="21495" y2="20000"/>
-                        <a14:foregroundMark x1="24299" y1="13628" x2="24299" y2="18230"/>
-                        <a14:foregroundMark x1="23832" y1="45841" x2="24112" y2="55575"/>
-                        <a14:foregroundMark x1="23271" y1="51150" x2="20000" y2="53982"/>
-                        <a14:foregroundMark x1="20748" y1="55221" x2="23645" y2="55575"/>
-                        <a14:foregroundMark x1="21121" y1="55575" x2="22991" y2="55575"/>
-                        <a14:foregroundMark x1="21121" y1="54690" x2="23178" y2="55044"/>
-                        <a14:foregroundMark x1="24019" y1="78584" x2="24486" y2="82124"/>
-                        <a14:foregroundMark x1="22336" y1="84071" x2="21589" y2="85133"/>
-                        <a14:backgroundMark x1="15981" y1="37168" x2="17196" y2="42478"/>
-                        <a14:backgroundMark x1="14953" y1="35398" x2="16075" y2="38938"/>
-                        <a14:backgroundMark x1="14766" y1="36283" x2="17196" y2="43894"/>
-                        <a14:backgroundMark x1="14393" y1="36637" x2="17196" y2="45841"/>
-                        <a14:backgroundMark x1="14486" y1="36283" x2="14953" y2="45841"/>
-                        <a14:backgroundMark x1="14579" y1="5133" x2="14299" y2="13451"/>
-                        <a14:backgroundMark x1="21776" y1="53982" x2="22523" y2="53982"/>
-                      </a14:backgroundRemoval>
-                    </a14:imgEffect>
-                  </a14:imgLayer>
-                </a14:imgProps>
-              </a:ext>
-            </a:extLst>
-          </a:blip>
-          <a:srcRect l="12167" t="9664" r="74875" b="12761"/>
-          <a:stretch>
-            <a:fillRect/>
-          </a:stretch>
-        </p:blipFill>
-        <p:spPr>
-          <a:xfrm>
-            <a:off x="2235201" y="886691"/>
-            <a:ext cx="1320800" cy="4174836"/>
+            <a:off x="0" y="968051"/>
+            <a:ext cx="12192000" cy="4921898"/>
           </a:xfrm>
           <a:prstGeom prst="rect">
             <a:avLst/>
@@ -3956,171 +3485,10 @@
       </p:pic>
       <p:pic>
         <p:nvPicPr>
-          <p:cNvPr id="17" name="圖片 16">
-            <a:extLst>
-              <a:ext uri="{FF2B5EF4-FFF2-40B4-BE49-F238E27FC236}">
-                <a16:creationId xmlns:a16="http://schemas.microsoft.com/office/drawing/2014/main" id="{DBD9C22E-8B33-47A3-FC3B-230922A50308}"/>
-              </a:ext>
-            </a:extLst>
-          </p:cNvPr>
-          <p:cNvPicPr>
-            <a:picLocks noChangeAspect="1"/>
-          </p:cNvPicPr>
-          <p:nvPr/>
-        </p:nvPicPr>
-        <p:blipFill>
-          <a:blip r:embed="rId5">
-            <a:extLst>
-              <a:ext uri="{BEBA8EAE-BF5A-486C-A8C5-ECC9F3942E4B}">
-                <a14:imgProps xmlns:a14="http://schemas.microsoft.com/office/drawing/2010/main">
-                  <a14:imgLayer r:embed="rId4">
-                    <a14:imgEffect>
-                      <a14:backgroundRemoval t="35752" b="99469" l="22991" r="42150">
-                        <a14:foregroundMark x1="35140" y1="85310" x2="34112" y2="99646"/>
-                        <a14:foregroundMark x1="22991" y1="88496" x2="34019" y2="89735"/>
-                        <a14:foregroundMark x1="33271" y1="89027" x2="25981" y2="86903"/>
-                        <a14:foregroundMark x1="35234" y1="85841" x2="35514" y2="94159"/>
-                        <a14:foregroundMark x1="35047" y1="51858" x2="34486" y2="62478"/>
-                        <a14:backgroundMark x1="36168" y1="51504" x2="37383" y2="62655"/>
-                        <a14:backgroundMark x1="35701" y1="52920" x2="35888" y2="64248"/>
-                        <a14:backgroundMark x1="35981" y1="75752" x2="35981" y2="97168"/>
-                        <a14:backgroundMark x1="40374" y1="79115" x2="41402" y2="90619"/>
-                        <a14:backgroundMark x1="40748" y1="82124" x2="41495" y2="49204"/>
-                        <a14:backgroundMark x1="30467" y1="42124" x2="31308" y2="46195"/>
-                        <a14:backgroundMark x1="29813" y1="68850" x2="32523" y2="79469"/>
-                        <a14:backgroundMark x1="31028" y1="56637" x2="31121" y2="74159"/>
-                        <a14:backgroundMark x1="31121" y1="48496" x2="31308" y2="55221"/>
-                        <a14:backgroundMark x1="31495" y1="48142" x2="35327" y2="50619"/>
-                        <a14:backgroundMark x1="31028" y1="75398" x2="32150" y2="82832"/>
-                        <a14:backgroundMark x1="33458" y1="76106" x2="35234" y2="76106"/>
-                      </a14:backgroundRemoval>
-                    </a14:imgEffect>
-                  </a14:imgLayer>
-                </a14:imgProps>
-              </a:ext>
-            </a:extLst>
-          </a:blip>
-          <a:srcRect l="27784" t="28940" r="56178"/>
-          <a:stretch>
-            <a:fillRect/>
-          </a:stretch>
-        </p:blipFill>
-        <p:spPr>
-          <a:xfrm>
-            <a:off x="3823817" y="1922588"/>
-            <a:ext cx="1634530" cy="3824162"/>
-          </a:xfrm>
-          <a:prstGeom prst="rect">
-            <a:avLst/>
-          </a:prstGeom>
-        </p:spPr>
-      </p:pic>
-    </p:spTree>
-    <p:extLst>
-      <p:ext uri="{BB962C8B-B14F-4D97-AF65-F5344CB8AC3E}">
-        <p14:creationId xmlns:p14="http://schemas.microsoft.com/office/powerpoint/2010/main" val="1902257605"/>
-      </p:ext>
-    </p:extLst>
-  </p:cSld>
-  <p:clrMapOvr>
-    <a:masterClrMapping/>
-  </p:clrMapOvr>
-  <mc:AlternateContent xmlns:mc="http://schemas.openxmlformats.org/markup-compatibility/2006">
-    <mc:Choice xmlns:p14="http://schemas.microsoft.com/office/powerpoint/2010/main" Requires="p14">
-      <p:transition spd="slow" p14:dur="2000">
-        <p:cut/>
-      </p:transition>
-    </mc:Choice>
-    <mc:Fallback>
-      <p:transition spd="slow">
-        <p:cut/>
-      </p:transition>
-    </mc:Fallback>
-  </mc:AlternateContent>
-</p:sld>
-</file>
-
-<file path=ppt/slides/slide3.xml><?xml version="1.0" encoding="utf-8"?>
-<p:sld xmlns:a="http://schemas.openxmlformats.org/drawingml/2006/main" xmlns:r="http://schemas.openxmlformats.org/officeDocument/2006/relationships" xmlns:p="http://schemas.openxmlformats.org/presentationml/2006/main">
-  <p:cSld>
-    <p:spTree>
-      <p:nvGrpSpPr>
-        <p:cNvPr id="1" name=""/>
-        <p:cNvGrpSpPr/>
-        <p:nvPr/>
-      </p:nvGrpSpPr>
-      <p:grpSpPr>
-        <a:xfrm>
-          <a:off x="0" y="0"/>
-          <a:ext cx="0" cy="0"/>
-          <a:chOff x="0" y="0"/>
-          <a:chExt cx="0" cy="0"/>
-        </a:xfrm>
-      </p:grpSpPr>
-      <p:sp>
-        <p:nvSpPr>
-          <p:cNvPr id="2" name="標題 1">
-            <a:extLst>
-              <a:ext uri="{FF2B5EF4-FFF2-40B4-BE49-F238E27FC236}">
-                <a16:creationId xmlns:a16="http://schemas.microsoft.com/office/drawing/2014/main" id="{F34781F3-096D-67AC-90C5-92FF1A81DCE9}"/>
-              </a:ext>
-            </a:extLst>
-          </p:cNvPr>
-          <p:cNvSpPr>
-            <a:spLocks noGrp="1"/>
-          </p:cNvSpPr>
-          <p:nvPr>
-            <p:ph type="title"/>
-          </p:nvPr>
-        </p:nvSpPr>
-        <p:spPr/>
-        <p:txBody>
-          <a:bodyPr/>
-          <a:lstStyle/>
-          <a:p>
-            <a:r>
-              <a:rPr lang="zh-TW" altLang="en-US" b="1"/>
-              <a:t>初始狀態</a:t>
-            </a:r>
-          </a:p>
-        </p:txBody>
-      </p:sp>
-      <p:pic>
-        <p:nvPicPr>
-          <p:cNvPr id="5" name="圖片 4">
-            <a:extLst>
-              <a:ext uri="{FF2B5EF4-FFF2-40B4-BE49-F238E27FC236}">
-                <a16:creationId xmlns:a16="http://schemas.microsoft.com/office/drawing/2014/main" id="{4E6AE516-1448-50B5-6C16-D5F087A5FADA}"/>
-              </a:ext>
-            </a:extLst>
-          </p:cNvPr>
-          <p:cNvPicPr>
-            <a:picLocks noChangeAspect="1"/>
-          </p:cNvPicPr>
-          <p:nvPr/>
-        </p:nvPicPr>
-        <p:blipFill>
-          <a:blip r:embed="rId2"/>
-          <a:stretch>
-            <a:fillRect/>
-          </a:stretch>
-        </p:blipFill>
-        <p:spPr>
-          <a:xfrm>
-            <a:off x="5978384" y="1323975"/>
-            <a:ext cx="3743325" cy="4210050"/>
-          </a:xfrm>
-          <a:prstGeom prst="rect">
-            <a:avLst/>
-          </a:prstGeom>
-        </p:spPr>
-      </p:pic>
-      <p:pic>
-        <p:nvPicPr>
-          <p:cNvPr id="7" name="圖片 6">
-            <a:extLst>
-              <a:ext uri="{FF2B5EF4-FFF2-40B4-BE49-F238E27FC236}">
-                <a16:creationId xmlns:a16="http://schemas.microsoft.com/office/drawing/2014/main" id="{30FFCDB0-0D3B-5874-066B-BDC1F5BAF6D0}"/>
+          <p:cNvPr id="14" name="圖片 13">
+            <a:extLst>
+              <a:ext uri="{FF2B5EF4-FFF2-40B4-BE49-F238E27FC236}">
+                <a16:creationId xmlns:a16="http://schemas.microsoft.com/office/drawing/2014/main" id="{96D19C27-DC10-B5D4-D793-B30A01976C5E}"/>
               </a:ext>
             </a:extLst>
           </p:cNvPr>
@@ -4137,8 +3505,8 @@
         </p:blipFill>
         <p:spPr>
           <a:xfrm>
-            <a:off x="0" y="2051339"/>
-            <a:ext cx="5019675" cy="2533650"/>
+            <a:off x="4282528" y="1982901"/>
+            <a:ext cx="7909472" cy="3152256"/>
           </a:xfrm>
           <a:prstGeom prst="rect">
             <a:avLst/>
@@ -4147,10 +3515,10 @@
       </p:pic>
       <p:sp>
         <p:nvSpPr>
-          <p:cNvPr id="8" name="標題 1">
-            <a:extLst>
-              <a:ext uri="{FF2B5EF4-FFF2-40B4-BE49-F238E27FC236}">
-                <a16:creationId xmlns:a16="http://schemas.microsoft.com/office/drawing/2014/main" id="{400A8A4C-9850-8D23-6F4B-9FDB6E3F9577}"/>
+          <p:cNvPr id="15" name="標題 1">
+            <a:extLst>
+              <a:ext uri="{FF2B5EF4-FFF2-40B4-BE49-F238E27FC236}">
+                <a16:creationId xmlns:a16="http://schemas.microsoft.com/office/drawing/2014/main" id="{61F3FA1B-F31D-9271-AF4D-85CC0AAAFAF7}"/>
               </a:ext>
             </a:extLst>
           </p:cNvPr>
@@ -4161,8 +3529,8 @@
         </p:nvSpPr>
         <p:spPr>
           <a:xfrm>
-            <a:off x="6717146" y="365125"/>
-            <a:ext cx="4326225" cy="1325563"/>
+            <a:off x="1320799" y="5135157"/>
+            <a:ext cx="11485419" cy="909716"/>
           </a:xfrm>
           <a:prstGeom prst="rect">
             <a:avLst/>
@@ -4193,154 +3561,22 @@
           </a:lstStyle>
           <a:p>
             <a:r>
-              <a:rPr lang="zh-TW" altLang="en-US" b="1"/>
-              <a:t>結束狀態</a:t>
-            </a:r>
-          </a:p>
-        </p:txBody>
-      </p:sp>
-    </p:spTree>
-    <p:extLst>
-      <p:ext uri="{BB962C8B-B14F-4D97-AF65-F5344CB8AC3E}">
-        <p14:creationId xmlns:p14="http://schemas.microsoft.com/office/powerpoint/2010/main" val="2727133165"/>
-      </p:ext>
-    </p:extLst>
-  </p:cSld>
-  <p:clrMapOvr>
-    <a:masterClrMapping/>
-  </p:clrMapOvr>
-  <mc:AlternateContent xmlns:mc="http://schemas.openxmlformats.org/markup-compatibility/2006">
-    <mc:Choice xmlns:p14="http://schemas.microsoft.com/office/powerpoint/2010/main" Requires="p14">
-      <p:transition spd="slow" p14:dur="2000">
-        <p:cut/>
-      </p:transition>
-    </mc:Choice>
-    <mc:Fallback>
-      <p:transition spd="slow">
-        <p:cut/>
-      </p:transition>
-    </mc:Fallback>
-  </mc:AlternateContent>
-</p:sld>
-</file>
-
-<file path=ppt/slides/slide4.xml><?xml version="1.0" encoding="utf-8"?>
-<p:sld xmlns:a="http://schemas.openxmlformats.org/drawingml/2006/main" xmlns:r="http://schemas.openxmlformats.org/officeDocument/2006/relationships" xmlns:p="http://schemas.openxmlformats.org/presentationml/2006/main">
-  <p:cSld>
-    <p:spTree>
-      <p:nvGrpSpPr>
-        <p:cNvPr id="1" name=""/>
-        <p:cNvGrpSpPr/>
-        <p:nvPr/>
-      </p:nvGrpSpPr>
-      <p:grpSpPr>
-        <a:xfrm>
-          <a:off x="0" y="0"/>
-          <a:ext cx="0" cy="0"/>
-          <a:chOff x="0" y="0"/>
-          <a:chExt cx="0" cy="0"/>
-        </a:xfrm>
-      </p:grpSpPr>
-      <p:pic>
-        <p:nvPicPr>
-          <p:cNvPr id="5" name="圖片 4">
-            <a:extLst>
-              <a:ext uri="{FF2B5EF4-FFF2-40B4-BE49-F238E27FC236}">
-                <a16:creationId xmlns:a16="http://schemas.microsoft.com/office/drawing/2014/main" id="{9394685E-7099-7B29-D76F-193FEE88AFC7}"/>
-              </a:ext>
-            </a:extLst>
-          </p:cNvPr>
-          <p:cNvPicPr>
-            <a:picLocks noChangeAspect="1"/>
-          </p:cNvPicPr>
-          <p:nvPr/>
-        </p:nvPicPr>
-        <p:blipFill>
-          <a:blip r:embed="rId2"/>
-          <a:stretch>
-            <a:fillRect/>
-          </a:stretch>
-        </p:blipFill>
-        <p:spPr>
-          <a:xfrm>
-            <a:off x="0" y="0"/>
-            <a:ext cx="9268294" cy="4410635"/>
-          </a:xfrm>
-          <a:prstGeom prst="rect">
-            <a:avLst/>
-          </a:prstGeom>
-        </p:spPr>
-      </p:pic>
-      <p:pic>
-        <p:nvPicPr>
-          <p:cNvPr id="9" name="圖片 8">
-            <a:extLst>
-              <a:ext uri="{FF2B5EF4-FFF2-40B4-BE49-F238E27FC236}">
-                <a16:creationId xmlns:a16="http://schemas.microsoft.com/office/drawing/2014/main" id="{B2BF641E-1DAA-6768-8AE7-F6F43603E758}"/>
-              </a:ext>
-            </a:extLst>
-          </p:cNvPr>
-          <p:cNvPicPr>
-            <a:picLocks noChangeAspect="1"/>
-          </p:cNvPicPr>
-          <p:nvPr/>
-        </p:nvPicPr>
-        <p:blipFill>
-          <a:blip r:embed="rId3"/>
-          <a:stretch>
-            <a:fillRect/>
-          </a:stretch>
-        </p:blipFill>
-        <p:spPr>
-          <a:xfrm>
-            <a:off x="9268294" y="889292"/>
-            <a:ext cx="2912965" cy="2632050"/>
-          </a:xfrm>
-          <a:prstGeom prst="rect">
-            <a:avLst/>
-          </a:prstGeom>
-          <a:solidFill>
-            <a:schemeClr val="bg1">
-              <a:alpha val="27000"/>
-            </a:schemeClr>
-          </a:solidFill>
-        </p:spPr>
-      </p:pic>
-      <p:sp>
-        <p:nvSpPr>
-          <p:cNvPr id="2" name="標題 1">
-            <a:extLst>
-              <a:ext uri="{FF2B5EF4-FFF2-40B4-BE49-F238E27FC236}">
-                <a16:creationId xmlns:a16="http://schemas.microsoft.com/office/drawing/2014/main" id="{77E84745-6E50-E7CD-18AC-BA9ACE278B87}"/>
-              </a:ext>
-            </a:extLst>
-          </p:cNvPr>
-          <p:cNvSpPr>
-            <a:spLocks noGrp="1"/>
-          </p:cNvSpPr>
-          <p:nvPr>
-            <p:ph type="title"/>
-          </p:nvPr>
-        </p:nvSpPr>
-        <p:spPr>
-          <a:xfrm>
-            <a:off x="10741" y="-97454"/>
-            <a:ext cx="10515600" cy="1325563"/>
-          </a:xfrm>
-        </p:spPr>
-        <p:txBody>
-          <a:bodyPr/>
-          <a:lstStyle/>
-          <a:p>
-            <a:r>
-              <a:rPr lang="zh-TW" altLang="en-US" b="1"/>
-              <a:t>康普頓效應</a:t>
-            </a:r>
-            <a:r>
-              <a:rPr lang="en-US" altLang="zh-TW" b="1"/>
-              <a:t>Compton Effect</a:t>
-            </a:r>
-            <a:endParaRPr lang="zh-TW" altLang="en-US" b="1"/>
+              <a:rPr lang="zh-TW" altLang="en-US" sz="2400" b="1"/>
+              <a:t>靶材</a:t>
+            </a:r>
+            <a:r>
+              <a:rPr lang="en-US" altLang="zh-TW" sz="2400" b="1"/>
+              <a:t>(</a:t>
+            </a:r>
+            <a:r>
+              <a:rPr lang="zh-TW" altLang="en-US" sz="2400" b="1"/>
+              <a:t>鎳單晶體</a:t>
+            </a:r>
+            <a:r>
+              <a:rPr lang="en-US" altLang="zh-TW" sz="2400" b="1"/>
+              <a:t>)</a:t>
+            </a:r>
+            <a:endParaRPr lang="zh-TW" altLang="en-US" sz="2400" b="1"/>
           </a:p>
         </p:txBody>
       </p:sp>
@@ -4354,13 +3590,13 @@
   <p:clrMapOvr>
     <a:masterClrMapping/>
   </p:clrMapOvr>
-  <mc:AlternateContent xmlns:mc="http://schemas.openxmlformats.org/markup-compatibility/2006">
-    <mc:Choice xmlns:p14="http://schemas.microsoft.com/office/powerpoint/2010/main" Requires="p14">
+  <mc:AlternateContent xmlns:mc="http://schemas.openxmlformats.org/markup-compatibility/2006" xmlns:p14="http://schemas.microsoft.com/office/powerpoint/2010/main">
+    <mc:Choice Requires="p14">
       <p:transition spd="slow" p14:dur="2000">
         <p:cut/>
       </p:transition>
     </mc:Choice>
-    <mc:Fallback>
+    <mc:Fallback xmlns="">
       <p:transition spd="slow">
         <p:cut/>
       </p:transition>
